--- a/docs/energypedia/brand/canva/Energypedia_Canva_relacja_1080x1920.pptx
+++ b/docs/energypedia/brand/canva/Energypedia_Canva_relacja_1080x1920.pptx
@@ -503,7 +503,7 @@
           <a:p>
             <a:r>
               <a:rPr lang="en-US" dirty="0"/>
-              <a:t>Relacja na żywo. Górne i dolne 250 px zasłania interfejs aplikacji — nic ważnego tam nie umieszczaj.</a:t>
+              <a:t>Relacja na żywo. Górne i dolne 250 px zasłania interfejs aplikacji – nic ważnego tam nie umieszczaj.</a:t>
             </a:r>
             <a:endParaRPr lang="en-US" dirty="0"/>
           </a:p>
